--- a/docs/簡報_FrontendQuizbank.pptx
+++ b/docs/簡報_FrontendQuizbank.pptx
@@ -5213,7 +5213,18 @@
                 <a:ea typeface="Trebuchet MS" pitchFamily="34" charset="-122"/>
                 <a:cs typeface="Trebuchet MS" pitchFamily="34" charset="-120"/>
               </a:rPr>
-              <a:t>⊘  因架構而不適用（主動說明）</a:t>
+              <a:t>⊘  </a:t>
+            </a:r>
+            <a:r>
+              <a:rPr lang="en-US" sz="1700" b="1" dirty="0" err="1">
+                <a:solidFill>
+                  <a:srgbClr val="FFB74D"/>
+                </a:solidFill>
+                <a:latin typeface="Trebuchet MS" pitchFamily="34" charset="0"/>
+                <a:ea typeface="Trebuchet MS" pitchFamily="34" charset="-122"/>
+                <a:cs typeface="Trebuchet MS" pitchFamily="34" charset="-120"/>
+              </a:rPr>
+              <a:t>因架構而不適用</a:t>
             </a:r>
             <a:endParaRPr lang="en-US" sz="1700" dirty="0"/>
           </a:p>
@@ -5291,7 +5302,7 @@
         </p:nvSpPr>
         <p:spPr>
           <a:xfrm>
-            <a:off x="6537960" y="4754880"/>
+            <a:off x="1005840" y="4663440"/>
             <a:ext cx="4754880" cy="0"/>
           </a:xfrm>
           <a:prstGeom prst="line">
@@ -5309,7 +5320,7 @@
           <a:bodyPr/>
           <a:lstStyle/>
           <a:p>
-            <a:endParaRPr lang="zh-TW" altLang="en-US"/>
+            <a:endParaRPr lang="zh-TW" altLang="en-US" dirty="0"/>
           </a:p>
         </p:txBody>
       </p:sp>
@@ -5321,7 +5332,7 @@
         </p:nvSpPr>
         <p:spPr>
           <a:xfrm>
-            <a:off x="6537960" y="4892040"/>
+            <a:off x="1005840" y="4834890"/>
             <a:ext cx="4754880" cy="411480"/>
           </a:xfrm>
           <a:prstGeom prst="rect">
@@ -5346,7 +5357,18 @@
                 <a:ea typeface="Trebuchet MS" pitchFamily="34" charset="-122"/>
                 <a:cs typeface="Trebuchet MS" pitchFamily="34" charset="-120"/>
               </a:rPr>
-              <a:t>🛡  部署層建議</a:t>
+              <a:t>🛡  </a:t>
+            </a:r>
+            <a:r>
+              <a:rPr lang="en-US" sz="1500" b="1" dirty="0" err="1">
+                <a:solidFill>
+                  <a:srgbClr val="64B5F6"/>
+                </a:solidFill>
+                <a:latin typeface="Trebuchet MS" pitchFamily="34" charset="0"/>
+                <a:ea typeface="Trebuchet MS" pitchFamily="34" charset="-122"/>
+                <a:cs typeface="Trebuchet MS" pitchFamily="34" charset="-120"/>
+              </a:rPr>
+              <a:t>部署</a:t>
             </a:r>
             <a:endParaRPr lang="en-US" sz="1500" dirty="0"/>
           </a:p>
@@ -5360,7 +5382,7 @@
         </p:nvSpPr>
         <p:spPr>
           <a:xfrm>
-            <a:off x="6537960" y="5349240"/>
+            <a:off x="1005840" y="5315766"/>
             <a:ext cx="4800600" cy="731520"/>
           </a:xfrm>
           <a:prstGeom prst="rect">
@@ -8168,7 +8190,7 @@
               <a:buNone/>
             </a:pPr>
             <a:r>
-              <a:rPr lang="en-US" sz="1200" dirty="0">
+              <a:rPr lang="en-US" sz="1200" dirty="0" err="1">
                 <a:solidFill>
                   <a:srgbClr val="9AA0B4"/>
                 </a:solidFill>
@@ -8176,7 +8198,7 @@
                 <a:ea typeface="Calibri" pitchFamily="34" charset="-122"/>
                 <a:cs typeface="Calibri" pitchFamily="34" charset="-120"/>
               </a:rPr>
-              <a:t>四大模組（分組分工）</a:t>
+              <a:t>四大模組</a:t>
             </a:r>
             <a:endParaRPr lang="en-US" sz="1200" dirty="0"/>
           </a:p>
@@ -8492,7 +8514,7 @@
                 <a:ea typeface="Calibri" pitchFamily="34" charset="-122"/>
                 <a:cs typeface="Calibri" pitchFamily="34" charset="-120"/>
               </a:rPr>
-              <a:t>DFD · Use Case · Sequence</a:t>
+              <a:t>DFD · Use Case</a:t>
             </a:r>
             <a:endParaRPr lang="en-US" sz="1200" dirty="0"/>
           </a:p>
